--- a/docs/figs/schematic_overview.pptx
+++ b/docs/figs/schematic_overview.pptx
@@ -243,7 +243,7 @@
           <a:p>
             <a:fld id="{4500DDF9-37A4-4EF1-9D2B-9606A59C7AB2}" type="datetimeFigureOut">
               <a:rPr lang="en-NL" smtClean="0"/>
-              <a:t>07/12/2021</a:t>
+              <a:t>09/02/2026</a:t>
             </a:fld>
             <a:endParaRPr lang="en-NL"/>
           </a:p>
@@ -413,7 +413,7 @@
           <a:p>
             <a:fld id="{4500DDF9-37A4-4EF1-9D2B-9606A59C7AB2}" type="datetimeFigureOut">
               <a:rPr lang="en-NL" smtClean="0"/>
-              <a:t>07/12/2021</a:t>
+              <a:t>09/02/2026</a:t>
             </a:fld>
             <a:endParaRPr lang="en-NL"/>
           </a:p>
@@ -593,7 +593,7 @@
           <a:p>
             <a:fld id="{4500DDF9-37A4-4EF1-9D2B-9606A59C7AB2}" type="datetimeFigureOut">
               <a:rPr lang="en-NL" smtClean="0"/>
-              <a:t>07/12/2021</a:t>
+              <a:t>09/02/2026</a:t>
             </a:fld>
             <a:endParaRPr lang="en-NL"/>
           </a:p>
@@ -763,7 +763,7 @@
           <a:p>
             <a:fld id="{4500DDF9-37A4-4EF1-9D2B-9606A59C7AB2}" type="datetimeFigureOut">
               <a:rPr lang="en-NL" smtClean="0"/>
-              <a:t>07/12/2021</a:t>
+              <a:t>09/02/2026</a:t>
             </a:fld>
             <a:endParaRPr lang="en-NL"/>
           </a:p>
@@ -1009,7 +1009,7 @@
           <a:p>
             <a:fld id="{4500DDF9-37A4-4EF1-9D2B-9606A59C7AB2}" type="datetimeFigureOut">
               <a:rPr lang="en-NL" smtClean="0"/>
-              <a:t>07/12/2021</a:t>
+              <a:t>09/02/2026</a:t>
             </a:fld>
             <a:endParaRPr lang="en-NL"/>
           </a:p>
@@ -1241,7 +1241,7 @@
           <a:p>
             <a:fld id="{4500DDF9-37A4-4EF1-9D2B-9606A59C7AB2}" type="datetimeFigureOut">
               <a:rPr lang="en-NL" smtClean="0"/>
-              <a:t>07/12/2021</a:t>
+              <a:t>09/02/2026</a:t>
             </a:fld>
             <a:endParaRPr lang="en-NL"/>
           </a:p>
@@ -1608,7 +1608,7 @@
           <a:p>
             <a:fld id="{4500DDF9-37A4-4EF1-9D2B-9606A59C7AB2}" type="datetimeFigureOut">
               <a:rPr lang="en-NL" smtClean="0"/>
-              <a:t>07/12/2021</a:t>
+              <a:t>09/02/2026</a:t>
             </a:fld>
             <a:endParaRPr lang="en-NL"/>
           </a:p>
@@ -1726,7 +1726,7 @@
           <a:p>
             <a:fld id="{4500DDF9-37A4-4EF1-9D2B-9606A59C7AB2}" type="datetimeFigureOut">
               <a:rPr lang="en-NL" smtClean="0"/>
-              <a:t>07/12/2021</a:t>
+              <a:t>09/02/2026</a:t>
             </a:fld>
             <a:endParaRPr lang="en-NL"/>
           </a:p>
@@ -1821,7 +1821,7 @@
           <a:p>
             <a:fld id="{4500DDF9-37A4-4EF1-9D2B-9606A59C7AB2}" type="datetimeFigureOut">
               <a:rPr lang="en-NL" smtClean="0"/>
-              <a:t>07/12/2021</a:t>
+              <a:t>09/02/2026</a:t>
             </a:fld>
             <a:endParaRPr lang="en-NL"/>
           </a:p>
@@ -2098,7 +2098,7 @@
           <a:p>
             <a:fld id="{4500DDF9-37A4-4EF1-9D2B-9606A59C7AB2}" type="datetimeFigureOut">
               <a:rPr lang="en-NL" smtClean="0"/>
-              <a:t>07/12/2021</a:t>
+              <a:t>09/02/2026</a:t>
             </a:fld>
             <a:endParaRPr lang="en-NL"/>
           </a:p>
@@ -2355,7 +2355,7 @@
           <a:p>
             <a:fld id="{4500DDF9-37A4-4EF1-9D2B-9606A59C7AB2}" type="datetimeFigureOut">
               <a:rPr lang="en-NL" smtClean="0"/>
-              <a:t>07/12/2021</a:t>
+              <a:t>09/02/2026</a:t>
             </a:fld>
             <a:endParaRPr lang="en-NL"/>
           </a:p>
@@ -2568,7 +2568,7 @@
           <a:p>
             <a:fld id="{4500DDF9-37A4-4EF1-9D2B-9606A59C7AB2}" type="datetimeFigureOut">
               <a:rPr lang="en-NL" smtClean="0"/>
-              <a:t>07/12/2021</a:t>
+              <a:t>09/02/2026</a:t>
             </a:fld>
             <a:endParaRPr lang="en-NL"/>
           </a:p>
@@ -3317,7 +3317,7 @@
         <p:spPr>
           <a:xfrm>
             <a:off x="1044144" y="101412"/>
-            <a:ext cx="908454" cy="307777"/>
+            <a:ext cx="1687834" cy="307777"/>
           </a:xfrm>
           <a:prstGeom prst="rect">
             <a:avLst/>
@@ -3334,7 +3334,7 @@
               <a:rPr lang="en-US" sz="1400" dirty="0">
                 <a:latin typeface="+mj-lt"/>
               </a:rPr>
-              <a:t>RGB-array</a:t>
+              <a:t>Audio file (wav/mp3)</a:t>
             </a:r>
             <a:endParaRPr lang="en-NL" sz="1400" dirty="0">
               <a:latin typeface="+mj-lt"/>
@@ -3397,8 +3397,8 @@
         </p:nvSpPr>
         <p:spPr>
           <a:xfrm>
-            <a:off x="638312" y="2180051"/>
-            <a:ext cx="1863587" cy="307777"/>
+            <a:off x="388586" y="2204750"/>
+            <a:ext cx="2089355" cy="307777"/>
           </a:xfrm>
           <a:prstGeom prst="rect">
             <a:avLst/>
@@ -3415,7 +3415,19 @@
               <a:rPr lang="en-US" sz="1400" dirty="0">
                 <a:latin typeface="+mj-lt"/>
               </a:rPr>
-              <a:t>Path to image locations</a:t>
+              <a:t>Path/</a:t>
+            </a:r>
+            <a:r>
+              <a:rPr lang="en-US" sz="1400" dirty="0" err="1">
+                <a:latin typeface="+mj-lt"/>
+              </a:rPr>
+              <a:t>dir</a:t>
+            </a:r>
+            <a:r>
+              <a:rPr lang="en-US" sz="1400" dirty="0">
+                <a:latin typeface="+mj-lt"/>
+              </a:rPr>
+              <a:t> to audio locations</a:t>
             </a:r>
             <a:endParaRPr lang="en-NL" sz="1400" dirty="0">
               <a:latin typeface="+mj-lt"/>
@@ -3588,25 +3600,7 @@
                 </a:solidFill>
                 <a:latin typeface="+mj-lt"/>
               </a:rPr>
-              <a:t>Color (</a:t>
-            </a:r>
-            <a:r>
-              <a:rPr lang="en-US" sz="1000" dirty="0" err="1">
-                <a:solidFill>
-                  <a:schemeClr val="tx1"/>
-                </a:solidFill>
-                <a:latin typeface="+mj-lt"/>
-              </a:rPr>
-              <a:t>rgb</a:t>
-            </a:r>
-            <a:r>
-              <a:rPr lang="en-US" sz="1000" dirty="0">
-                <a:solidFill>
-                  <a:schemeClr val="tx1"/>
-                </a:solidFill>
-                <a:latin typeface="+mj-lt"/>
-              </a:rPr>
-              <a:t>/gray)</a:t>
+              <a:t>Normalize</a:t>
             </a:r>
             <a:endParaRPr lang="en-NL" sz="1000" dirty="0">
               <a:solidFill>
@@ -3648,9 +3642,12 @@
             <a:pPr algn="ctr"/>
             <a:r>
               <a:rPr lang="en-US" sz="1000" dirty="0">
+                <a:solidFill>
+                  <a:schemeClr val="tx1"/>
+                </a:solidFill>
                 <a:latin typeface="+mj-lt"/>
               </a:rPr>
-              <a:t>Resize</a:t>
+              <a:t>SR</a:t>
             </a:r>
             <a:endParaRPr lang="en-NL" sz="1000" dirty="0">
               <a:solidFill>
@@ -3891,7 +3888,7 @@
                 </a:solidFill>
                 <a:latin typeface="+mj-lt"/>
               </a:rPr>
-              <a:t>HOG</a:t>
+              <a:t>MFCC</a:t>
             </a:r>
             <a:endParaRPr lang="en-NL" sz="1000" dirty="0">
               <a:solidFill>
@@ -5052,7 +5049,7 @@
                 </a:solidFill>
                 <a:latin typeface="+mj-lt"/>
               </a:rPr>
-              <a:t>Scale</a:t>
+              <a:t>Denoise</a:t>
             </a:r>
             <a:endParaRPr lang="en-NL" sz="1000" dirty="0">
               <a:solidFill>
